--- a/deliverables/decks/SENTINEL-CXR_Week6_Progress.pptx
+++ b/deliverables/decks/SENTINEL-CXR_Week6_Progress.pptx
@@ -8583,7 +8583,7 @@
                 </a:solidFill>
                 <a:latin typeface="Calibri"/>
               </a:rPr>
-              <a:t>Full-stack system built and running. 80 automated tests passing. Real pretrained inference verified end-to-end at 583 ms.</a:t>
+              <a:t>Full-stack system live on free-tier infrastructure. 83 tests passing. Real inference in ~150 ms via a 7.9 MB quantised model carried by the API itself.</a:t>
             </a:r>
           </a:p>
         </p:txBody>
@@ -8709,7 +8709,7 @@
                 </a:solidFill>
                 <a:latin typeface="Calibri"/>
               </a:rPr>
-              <a:t>Conformal implementation validated: 0.9004 empirical coverage against a 0.90 target. Backprop verified to 1e-11.</a:t>
+              <a:t>Calibrated on 4,999 real radiographs: coverage 0.8845, and a fairness audit that FAILS its own tolerance at 0.2149.</a:t>
             </a:r>
           </a:p>
         </p:txBody>
@@ -8835,7 +8835,7 @@
                 </a:solidFill>
                 <a:latin typeface="Calibri"/>
               </a:rPr>
-              <a:t>Full training run on the complete dataset; fairness audit; DQN training against the cost-based environment.</a:t>
+              <a:t>Group-trained weights to replace the pretrained checkpoint; DQN training; VAE gate; wider calibration corpus.</a:t>
             </a:r>
           </a:p>
         </p:txBody>
@@ -9458,7 +9458,7 @@
                 </a:solidFill>
                 <a:latin typeface="Calibri"/>
               </a:rPr>
-              <a:t>Stored scores ≠ decision scores</a:t>
+              <a:t>int8 model would not load in production</a:t>
             </a:r>
           </a:p>
         </p:txBody>
@@ -9497,7 +9497,7 @@
                 </a:solidFill>
                 <a:latin typeface="Consolas"/>
               </a:rPr>
-              <a:t>UI showed a probability above threshold beside 'not included'</a:t>
+              <a:t>Verified numerically but never verified as executable on the pinned runtime</a:t>
             </a:r>
           </a:p>
         </p:txBody>
@@ -10002,7 +10002,7 @@
                 </a:solidFill>
                 <a:latin typeface="Calibri"/>
               </a:rPr>
-              <a:t>Full training run + calibration</a:t>
+              <a:t>Model, ONNX export, calibration</a:t>
             </a:r>
           </a:p>
         </p:txBody>
@@ -10041,7 +10041,7 @@
                 </a:solidFill>
                 <a:latin typeface="Consolas"/>
               </a:rPr>
-              <a:t>Krishna</a:t>
+              <a:t>Krishna Mathur</a:t>
             </a:r>
           </a:p>
         </p:txBody>
@@ -10163,7 +10163,7 @@
                 </a:solidFill>
                 <a:latin typeface="Calibri"/>
               </a:rPr>
-              <a:t>Deployment + evaluation harness</a:t>
+              <a:t>Deployment, resilience, CI gates</a:t>
             </a:r>
           </a:p>
         </p:txBody>
@@ -10202,7 +10202,7 @@
                 </a:solidFill>
                 <a:latin typeface="Consolas"/>
               </a:rPr>
-              <a:t>Atharva</a:t>
+              <a:t>Atharva Soundankar</a:t>
             </a:r>
           </a:p>
         </p:txBody>
@@ -10241,7 +10241,7 @@
                 </a:solidFill>
                 <a:latin typeface="Consolas"/>
               </a:rPr>
-              <a:t>Live URLs, CI gates</a:t>
+              <a:t>Live URLs, 83 tests</a:t>
             </a:r>
           </a:p>
         </p:txBody>
@@ -10324,7 +10324,7 @@
                 </a:solidFill>
                 <a:latin typeface="Calibri"/>
               </a:rPr>
-              <a:t>Fairness audit + interface</a:t>
+              <a:t>Console, dashboard, fairness</a:t>
             </a:r>
           </a:p>
         </p:txBody>
@@ -10363,7 +10363,7 @@
                 </a:solidFill>
                 <a:latin typeface="Consolas"/>
               </a:rPr>
-              <a:t>Yash</a:t>
+              <a:t>Yash Petkar</a:t>
             </a:r>
           </a:p>
         </p:txBody>
@@ -10402,7 +10402,7 @@
                 </a:solidFill>
                 <a:latin typeface="Consolas"/>
               </a:rPr>
-              <a:t>fairness_report.json, console</a:t>
+              <a:t>fairness_report.json</a:t>
             </a:r>
           </a:p>
         </p:txBody>
@@ -10485,7 +10485,7 @@
                 </a:solidFill>
                 <a:latin typeface="Calibri"/>
               </a:rPr>
-              <a:t>Report and final deck</a:t>
+              <a:t>Report and both decks</a:t>
             </a:r>
           </a:p>
         </p:txBody>
@@ -10524,7 +10524,7 @@
                 </a:solidFill>
                 <a:latin typeface="Consolas"/>
               </a:rPr>
-              <a:t>All</a:t>
+              <a:t>All three</a:t>
             </a:r>
           </a:p>
         </p:txBody>
@@ -10563,7 +10563,7 @@
                 </a:solidFill>
                 <a:latin typeface="Consolas"/>
               </a:rPr>
-              <a:t>15–20 pp report, 15-slide deck</a:t>
+              <a:t>15 pp report, 25 slides</a:t>
             </a:r>
           </a:p>
         </p:txBody>

--- a/deliverables/decks/SENTINEL-CXR_Week6_Progress.pptx
+++ b/deliverables/decks/SENTINEL-CXR_Week6_Progress.pptx
@@ -3472,7 +3472,7 @@
         <p:spPr>
           <a:xfrm>
             <a:off x="640080" y="5760720"/>
-            <a:ext cx="10881360" cy="365760"/>
+            <a:ext cx="5943600" cy="365760"/>
           </a:xfrm>
           <a:prstGeom prst="rect">
             <a:avLst/>
@@ -3505,6 +3505,61 @@
       <p:sp>
         <p:nvSpPr>
           <p:cNvPr id="12" name="TextBox 11"/>
+          <p:cNvSpPr txBox="1"/>
+          <p:nvPr/>
+        </p:nvSpPr>
+        <p:spPr>
+          <a:xfrm>
+            <a:off x="6766560" y="5623560"/>
+            <a:ext cx="4754880" cy="640080"/>
+          </a:xfrm>
+          <a:prstGeom prst="rect">
+            <a:avLst/>
+          </a:prstGeom>
+          <a:noFill/>
+        </p:spPr>
+        <p:txBody>
+          <a:bodyPr wrap="square" anchor="t">
+            <a:spAutoFit/>
+          </a:bodyPr>
+          <a:lstStyle/>
+          <a:p>
+            <a:pPr algn="r">
+              <a:lnSpc>
+                <a:spcPct val="120000"/>
+              </a:lnSpc>
+            </a:pPr>
+            <a:r>
+              <a:rPr sz="1100" b="0" i="0">
+                <a:solidFill>
+                  <a:srgbClr val="E8ECEF"/>
+                </a:solidFill>
+                <a:latin typeface="Consolas"/>
+              </a:rPr>
+              <a:t>LIVE  sentinel-cxr.vercel.app</a:t>
+            </a:r>
+          </a:p>
+          <a:p>
+            <a:pPr algn="r">
+              <a:lnSpc>
+                <a:spcPct val="120000"/>
+              </a:lnSpc>
+            </a:pPr>
+            <a:r>
+              <a:rPr sz="1100" b="0" i="0">
+                <a:solidFill>
+                  <a:srgbClr val="E8ECEF"/>
+                </a:solidFill>
+                <a:latin typeface="Consolas"/>
+              </a:rPr>
+              <a:t>CODE  github.com/krish2105/Deep-Learning-</a:t>
+            </a:r>
+          </a:p>
+        </p:txBody>
+      </p:sp>
+      <p:sp>
+        <p:nvSpPr>
+          <p:cNvPr id="13" name="TextBox 12"/>
           <p:cNvSpPr txBox="1"/>
           <p:nvPr/>
         </p:nvSpPr>
@@ -3689,7 +3744,7 @@
         </p:nvSpPr>
         <p:spPr>
           <a:xfrm>
-            <a:off x="640080" y="2377440"/>
+            <a:off x="640080" y="2194560"/>
             <a:ext cx="10881360" cy="1371600"/>
           </a:xfrm>
           <a:prstGeom prst="rect">
@@ -3728,7 +3783,7 @@
         </p:nvSpPr>
         <p:spPr>
           <a:xfrm>
-            <a:off x="640080" y="3566160"/>
+            <a:off x="640080" y="3383280"/>
             <a:ext cx="2743200" cy="25400"/>
           </a:xfrm>
           <a:prstGeom prst="rect">
@@ -3766,75 +3821,139 @@
       </p:sp>
       <p:sp>
         <p:nvSpPr>
-          <p:cNvPr id="7" name="TextBox 6"/>
-          <p:cNvSpPr txBox="1"/>
-          <p:nvPr/>
-        </p:nvSpPr>
-        <p:spPr>
-          <a:xfrm>
-            <a:off x="640080" y="3840480"/>
-            <a:ext cx="10881360" cy="822960"/>
-          </a:xfrm>
-          <a:prstGeom prst="rect">
-            <a:avLst/>
-          </a:prstGeom>
-          <a:noFill/>
-        </p:spPr>
-        <p:txBody>
-          <a:bodyPr wrap="square" anchor="t">
-            <a:spAutoFit/>
-          </a:bodyPr>
-          <a:lstStyle/>
-          <a:p>
-            <a:pPr algn="l">
-              <a:lnSpc>
-                <a:spcPct val="100000"/>
-              </a:lnSpc>
-            </a:pPr>
-            <a:r>
-              <a:rPr sz="1500" b="0" i="0">
+          <p:cNvPr id="7" name="Rounded Rectangle 6"/>
+          <p:cNvSpPr/>
+          <p:nvPr/>
+        </p:nvSpPr>
+        <p:spPr>
+          <a:xfrm>
+            <a:off x="640080" y="3657600"/>
+            <a:ext cx="10881360" cy="960120"/>
+          </a:xfrm>
+          <a:prstGeom prst="roundRect">
+            <a:avLst>
+              <a:gd name="adj" fmla="val 3000"/>
+            </a:avLst>
+          </a:prstGeom>
+          <a:solidFill>
+            <a:srgbClr val="16191B"/>
+          </a:solidFill>
+          <a:ln w="9525">
+            <a:solidFill>
+              <a:srgbClr val="2A2F33"/>
+            </a:solidFill>
+          </a:ln>
+          <a:effectLst/>
+        </p:spPr>
+        <p:style>
+          <a:lnRef idx="1">
+            <a:schemeClr val="accent1"/>
+          </a:lnRef>
+          <a:fillRef idx="3">
+            <a:schemeClr val="accent1"/>
+          </a:fillRef>
+          <a:effectRef idx="2">
+            <a:schemeClr val="accent1"/>
+          </a:effectRef>
+          <a:fontRef idx="minor">
+            <a:schemeClr val="lt1"/>
+          </a:fontRef>
+        </p:style>
+        <p:txBody>
+          <a:bodyPr rtlCol="0" anchor="ctr"/>
+          <a:lstStyle/>
+          <a:p>
+            <a:pPr algn="ctr"/>
+          </a:p>
+        </p:txBody>
+      </p:sp>
+      <p:sp>
+        <p:nvSpPr>
+          <p:cNvPr id="8" name="TextBox 7"/>
+          <p:cNvSpPr txBox="1"/>
+          <p:nvPr/>
+        </p:nvSpPr>
+        <p:spPr>
+          <a:xfrm>
+            <a:off x="914400" y="3822191"/>
+            <a:ext cx="10332720" cy="685800"/>
+          </a:xfrm>
+          <a:prstGeom prst="rect">
+            <a:avLst/>
+          </a:prstGeom>
+          <a:noFill/>
+        </p:spPr>
+        <p:txBody>
+          <a:bodyPr wrap="square" anchor="t">
+            <a:spAutoFit/>
+          </a:bodyPr>
+          <a:lstStyle/>
+          <a:p>
+            <a:pPr algn="l">
+              <a:lnSpc>
+                <a:spcPct val="125000"/>
+              </a:lnSpc>
+            </a:pPr>
+            <a:r>
+              <a:rPr sz="1300" b="0" i="0">
+                <a:solidFill>
+                  <a:srgbClr val="E8ECEF"/>
+                </a:solidFill>
+                <a:latin typeface="Consolas"/>
+              </a:rPr>
+              <a:t>TRY IT   sentinel-cxr.vercel.app  —  console → “Explore the demo”, no sign-up</a:t>
+            </a:r>
+          </a:p>
+          <a:p>
+            <a:pPr algn="l">
+              <a:lnSpc>
+                <a:spcPct val="125000"/>
+              </a:lnSpc>
+            </a:pPr>
+            <a:r>
+              <a:rPr sz="1300" b="0" i="0">
+                <a:solidFill>
+                  <a:srgbClr val="E8ECEF"/>
+                </a:solidFill>
+                <a:latin typeface="Consolas"/>
+              </a:rPr>
+              <a:t>CODE     github.com/krish2105/Deep-Learning-</a:t>
+            </a:r>
+          </a:p>
+        </p:txBody>
+      </p:sp>
+      <p:sp>
+        <p:nvSpPr>
+          <p:cNvPr id="9" name="TextBox 8"/>
+          <p:cNvSpPr txBox="1"/>
+          <p:nvPr/>
+        </p:nvSpPr>
+        <p:spPr>
+          <a:xfrm>
+            <a:off x="640080" y="4846320"/>
+            <a:ext cx="10881360" cy="457200"/>
+          </a:xfrm>
+          <a:prstGeom prst="rect">
+            <a:avLst/>
+          </a:prstGeom>
+          <a:noFill/>
+        </p:spPr>
+        <p:txBody>
+          <a:bodyPr wrap="square" anchor="t">
+            <a:spAutoFit/>
+          </a:bodyPr>
+          <a:lstStyle/>
+          <a:p>
+            <a:pPr algn="l">
+              <a:lnSpc>
+                <a:spcPct val="100000"/>
+              </a:lnSpc>
+            </a:pPr>
+            <a:r>
+              <a:rPr sz="1200" b="0" i="0">
                 <a:solidFill>
                   <a:srgbClr val="8A9299"/>
                 </a:solidFill>
-                <a:latin typeface="Consolas"/>
-              </a:rPr>
-              <a:t>github.com/krish2105/Deep-Learning-</a:t>
-            </a:r>
-          </a:p>
-        </p:txBody>
-      </p:sp>
-      <p:sp>
-        <p:nvSpPr>
-          <p:cNvPr id="8" name="TextBox 7"/>
-          <p:cNvSpPr txBox="1"/>
-          <p:nvPr/>
-        </p:nvSpPr>
-        <p:spPr>
-          <a:xfrm>
-            <a:off x="640080" y="4572000"/>
-            <a:ext cx="10881360" cy="457200"/>
-          </a:xfrm>
-          <a:prstGeom prst="rect">
-            <a:avLst/>
-          </a:prstGeom>
-          <a:noFill/>
-        </p:spPr>
-        <p:txBody>
-          <a:bodyPr wrap="square" anchor="t">
-            <a:spAutoFit/>
-          </a:bodyPr>
-          <a:lstStyle/>
-          <a:p>
-            <a:pPr algn="l">
-              <a:lnSpc>
-                <a:spcPct val="100000"/>
-              </a:lnSpc>
-            </a:pPr>
-            <a:r>
-              <a:rPr sz="1200" b="0" i="0">
-                <a:solidFill>
-                  <a:srgbClr val="8A9299"/>
-                </a:solidFill>
                 <a:latin typeface="Calibri"/>
               </a:rPr>
               <a:t>Krishna Mathur AS25DXB018 · Atharva Soundankar AS25DXB020 · Yash Petkar AS25DXB021</a:t>
@@ -3844,7 +3963,7 @@
       </p:sp>
       <p:sp>
         <p:nvSpPr>
-          <p:cNvPr id="9" name="TextBox 8"/>
+          <p:cNvPr id="10" name="TextBox 9"/>
           <p:cNvSpPr txBox="1"/>
           <p:nvPr/>
         </p:nvSpPr>
